--- a/examples/repositories/image-to-editable/deck.pptx
+++ b/examples/repositories/image-to-editable/deck.pptx
@@ -971,9 +971,9 @@
                 <a:solidFill>
                   <a:srgbClr val="0D2C56"/>
                 </a:solidFill>
-                <a:latin typeface="Yu Gothic"/>
-                <a:ea typeface="Yu Gothic"/>
-                <a:cs typeface="Yu Gothic"/>
+                <a:latin typeface="BIZ UDPGothic"/>
+                <a:ea typeface="BIZ UDPGothic"/>
+                <a:cs typeface="BIZ UDPGothic"/>
               </a:rPr>
               <a:t>Gitの保存・記録・共有</a:t>
             </a:r>
@@ -1012,9 +1012,9 @@
                 <a:solidFill>
                   <a:srgbClr val="0D2C56"/>
                 </a:solidFill>
-                <a:latin typeface="Yu Gothic"/>
-                <a:ea typeface="Yu Gothic"/>
-                <a:cs typeface="Yu Gothic"/>
+                <a:latin typeface="BIZ UDPGothic"/>
+                <a:ea typeface="BIZ UDPGothic"/>
+                <a:cs typeface="BIZ UDPGothic"/>
               </a:rPr>
               <a:t>はじめてのGit・3分入門</a:t>
             </a:r>
@@ -1053,9 +1053,9 @@
                 <a:solidFill>
                   <a:srgbClr val="0D2C56"/>
                 </a:solidFill>
-                <a:latin typeface="Yu Gothic"/>
-                <a:ea typeface="Yu Gothic"/>
-                <a:cs typeface="Yu Gothic"/>
+                <a:latin typeface="BIZ UDPGothic"/>
+                <a:ea typeface="BIZ UDPGothic"/>
+                <a:cs typeface="BIZ UDPGothic"/>
               </a:rPr>
               <a:t>保存しただけでは、履歴にも共有先にも届かない</a:t>
             </a:r>
@@ -1094,9 +1094,9 @@
                 <a:solidFill>
                   <a:srgbClr val="FFFFFF"/>
                 </a:solidFill>
-                <a:latin typeface="Yu Gothic"/>
-                <a:ea typeface="Yu Gothic"/>
-                <a:cs typeface="Yu Gothic"/>
+                <a:latin typeface="BIZ UDPGothic"/>
+                <a:ea typeface="BIZ UDPGothic"/>
+                <a:cs typeface="BIZ UDPGothic"/>
               </a:rPr>
               <a:t>保存</a:t>
             </a:r>
@@ -1135,9 +1135,9 @@
                 <a:solidFill>
                   <a:srgbClr val="0D2C56"/>
                 </a:solidFill>
-                <a:latin typeface="Yu Gothic"/>
-                <a:ea typeface="Yu Gothic"/>
-                <a:cs typeface="Yu Gothic"/>
+                <a:latin typeface="BIZ UDPGothic"/>
+                <a:ea typeface="BIZ UDPGothic"/>
+                <a:cs typeface="BIZ UDPGothic"/>
               </a:rPr>
               <a:t>ファイルに反映</a:t>
             </a:r>
@@ -1176,9 +1176,9 @@
                 <a:solidFill>
                   <a:srgbClr val="FFFFFF"/>
                 </a:solidFill>
-                <a:latin typeface="Yu Gothic"/>
-                <a:ea typeface="Yu Gothic"/>
-                <a:cs typeface="Yu Gothic"/>
+                <a:latin typeface="BIZ UDPGothic"/>
+                <a:ea typeface="BIZ UDPGothic"/>
+                <a:cs typeface="BIZ UDPGothic"/>
               </a:rPr>
               <a:t>記録</a:t>
             </a:r>
@@ -1217,9 +1217,9 @@
                 <a:solidFill>
                   <a:srgbClr val="0D2C56"/>
                 </a:solidFill>
-                <a:latin typeface="Yu Gothic"/>
-                <a:ea typeface="Yu Gothic"/>
-                <a:cs typeface="Yu Gothic"/>
+                <a:latin typeface="BIZ UDPGothic"/>
+                <a:ea typeface="BIZ UDPGothic"/>
+                <a:cs typeface="BIZ UDPGothic"/>
               </a:rPr>
               <a:t>手元の履歴に残す</a:t>
             </a:r>
@@ -1258,9 +1258,9 @@
                 <a:solidFill>
                   <a:srgbClr val="FFFFFF"/>
                 </a:solidFill>
-                <a:latin typeface="Yu Gothic"/>
-                <a:ea typeface="Yu Gothic"/>
-                <a:cs typeface="Yu Gothic"/>
+                <a:latin typeface="BIZ UDPGothic"/>
+                <a:ea typeface="BIZ UDPGothic"/>
+                <a:cs typeface="BIZ UDPGothic"/>
               </a:rPr>
               <a:t>共有</a:t>
             </a:r>
@@ -1299,9 +1299,9 @@
                 <a:solidFill>
                   <a:srgbClr val="0D2C56"/>
                 </a:solidFill>
-                <a:latin typeface="Yu Gothic"/>
-                <a:ea typeface="Yu Gothic"/>
-                <a:cs typeface="Yu Gothic"/>
+                <a:latin typeface="BIZ UDPGothic"/>
+                <a:ea typeface="BIZ UDPGothic"/>
+                <a:cs typeface="BIZ UDPGothic"/>
               </a:rPr>
               <a:t>リモートへ送る</a:t>
             </a:r>
@@ -2154,17 +2154,17 @@
           <a:p>
             <a:pPr algn="ctr"/>
             <a:r>
-              <a:rPr lang="zh-CN" sz="2300" b="1">
+              <a:rPr lang="zh-CN" sz="2150" b="1">
                 <a:solidFill>
                   <a:srgbClr val="0D2C56"/>
                 </a:solidFill>
-                <a:latin typeface="Arial Narrow"/>
-                <a:ea typeface="Arial Narrow"/>
-                <a:cs typeface="Arial Narrow"/>
+                <a:latin typeface="Arial"/>
+                <a:ea typeface="Arial"/>
+                <a:cs typeface="Arial"/>
               </a:rPr>
               <a:t>git add</a:t>
             </a:r>
-            <a:endParaRPr lang="zh-CN" sz="2300"/>
+            <a:endParaRPr lang="zh-CN" sz="2150"/>
           </a:p>
         </p:txBody>
       </p:sp>
@@ -2176,8 +2176,8 @@
         </p:nvSpPr>
         <p:spPr>
           <a:xfrm>
-            <a:off x="7487854" y="3986531"/>
-            <a:ext cx="1238959" cy="386264"/>
+            <a:off x="7517006" y="3986531"/>
+            <a:ext cx="1166079" cy="386264"/>
           </a:xfrm>
           <a:prstGeom prst="rect">
             <a:avLst/>
@@ -2195,7 +2195,7 @@
           <a:p>
             <a:pPr algn="ctr"/>
             <a:r>
-              <a:rPr lang="zh-CN" sz="2300" b="1">
+              <a:rPr lang="zh-CN" sz="2150" b="1">
                 <a:solidFill>
                   <a:srgbClr val="0D2C56"/>
                 </a:solidFill>
@@ -2205,7 +2205,7 @@
               </a:rPr>
               <a:t>git commit</a:t>
             </a:r>
-            <a:endParaRPr lang="zh-CN" sz="2300"/>
+            <a:endParaRPr lang="zh-CN" sz="2150"/>
           </a:p>
         </p:txBody>
       </p:sp>
